--- a/files/day74.pptx
+++ b/files/day74.pptx
@@ -960,7 +960,7 @@
           <a:p>
             <a:r>
               <a:rPr lang="en-US" dirty="0"/>
-              <a:t>덤 두 가지. 첫째, 인덱스 조인이요. 플랜에 index 달러 join이라는 뷰가 나왔는데, 한 테이블의 인덱스 두 개를 각각 빠르게 훑고 rowid로 해시 조인한 거예요. 같은 행의 city와 location_id를 rowid로 맞춰 붙이니 테이블 블록엔 갈 필요가 없죠. 단, SELECT 컬럼이 전부 인덱스 안에 있을 때만 됩니다. 둘째, 오타 사례 2탄 — gather_plan_statistics에서 i가 빠진 채 돌렸더니 이번엔 플랜 Note가 통계를 못 모았다고 경고를 남겼어요. 어제 nse_nl은 조용히 무시됐는데, 이번엔 흔적이 남는 케이스입니다.</a:t>
+              <a:t>덤 두 가지. 첫째, 인덱스 조인 심화요. 조건이 두 개인데 서로 다른 인덱스에 있는 경우 — employee_id 110 미만에 job_id IT_PROG. 기본 플랜은 job 인덱스로 들어가서 employee_id는 테이블에서 filter로 확인했어요, 버퍼 4. 그런데 index_join 힌트를 주면 두 인덱스를 각각 range scan해서 rowid로 교집합합니다. 두 조건이 전부 access가 되고 테이블엔 아예 안 가요, 버퍼 3. 다만 만능이 아닙니다 — 조건 없는 조회에선 옵티마이저가 스스로 index join을 골랐는데 16이었고, full 강제가 11로 더 쌌어요. 작은 테이블에선 인덱스 두 개 합산이 오히려 큽니다. 둘째, 오타 사례 2탄 — gather_plan_statistics에서 i가 빠지니 이번엔 플랜 Note가 통계 못 모았다고 경고를 남겼어요. 어제 nse_nl은 조용히 무시됐는데 이번엔 흔적이 남는 케이스.</a:t>
             </a:r>
             <a:endParaRPr lang="en-US" dirty="0"/>
           </a:p>
@@ -4828,7 +4828,7 @@
                 <a:ea typeface="맑은 고딕" pitchFamily="34" charset="-122"/>
                 <a:cs typeface="맑은 고딕" pitchFamily="34" charset="-120"/>
               </a:rPr>
-              <a:t>Index Join — 테이블에 안 가고 인덱스끼리 rowid로 조인한다</a:t>
+              <a:t>Index Join — filter까지 access로 바꾼다, 단 만능은 아니다</a:t>
             </a:r>
             <a:endParaRPr lang="en-US" sz="1900" dirty="0"/>
           </a:p>
@@ -4984,12 +4984,12 @@
         </p:nvSpPr>
         <p:spPr>
           <a:xfrm>
-            <a:off x="841248" y="1737360"/>
-            <a:ext cx="10506456" cy="2057400"/>
+            <a:off x="841248" y="2098548"/>
+            <a:ext cx="10506456" cy="1801368"/>
           </a:xfrm>
           <a:prstGeom prst="roundRect">
             <a:avLst>
-              <a:gd name="adj" fmla="val 2667"/>
+              <a:gd name="adj" fmla="val 3046"/>
             </a:avLst>
           </a:prstGeom>
           <a:solidFill>
@@ -5018,7 +5018,7 @@
         </p:nvSpPr>
         <p:spPr>
           <a:xfrm>
-            <a:off x="1161288" y="1993392"/>
+            <a:off x="1161288" y="2354580"/>
             <a:ext cx="118872" cy="118872"/>
           </a:xfrm>
           <a:prstGeom prst="ellipse">
@@ -5043,7 +5043,7 @@
         </p:nvSpPr>
         <p:spPr>
           <a:xfrm>
-            <a:off x="1389888" y="1993392"/>
+            <a:off x="1389888" y="2354580"/>
             <a:ext cx="118872" cy="118872"/>
           </a:xfrm>
           <a:prstGeom prst="ellipse">
@@ -5068,7 +5068,7 @@
         </p:nvSpPr>
         <p:spPr>
           <a:xfrm>
-            <a:off x="1618488" y="1993392"/>
+            <a:off x="1618488" y="2354580"/>
             <a:ext cx="118872" cy="118872"/>
           </a:xfrm>
           <a:prstGeom prst="ellipse">
@@ -5093,8 +5093,8 @@
         </p:nvSpPr>
         <p:spPr>
           <a:xfrm>
-            <a:off x="1161288" y="2395728"/>
-            <a:ext cx="9957816" cy="1234440"/>
+            <a:off x="1161288" y="2756916"/>
+            <a:ext cx="9957816" cy="978408"/>
           </a:xfrm>
           <a:prstGeom prst="rect">
             <a:avLst/>
@@ -5112,13 +5112,13 @@
             <a:r>
               <a:rPr lang="en-US" sz="1250" dirty="0">
                 <a:solidFill>
-                  <a:srgbClr val="E7E2D8"/>
+                  <a:srgbClr val="9AA6A0"/>
                 </a:solidFill>
                 <a:latin typeface="Consolas" pitchFamily="34" charset="0"/>
                 <a:ea typeface="Consolas" pitchFamily="34" charset="-122"/>
                 <a:cs typeface="Consolas" pitchFamily="34" charset="-120"/>
               </a:rPr>
-              <a:t>| 3 |  VIEW               | index$_join$_003 | 23행 | 8 |</a:t>
+              <a:t>-- emp_id&lt;110 AND job_id='IT_PROG' — 기본 4 vs index_join 3</a:t>
             </a:r>
             <a:endParaRPr lang="en-US" sz="1250" dirty="0"/>
           </a:p>
@@ -5135,7 +5135,7 @@
                 <a:ea typeface="Consolas" pitchFamily="34" charset="-122"/>
                 <a:cs typeface="Consolas" pitchFamily="34" charset="-120"/>
               </a:rPr>
-              <a:t>|*4 |   HASH JOIN         | access(ROWID=ROWID)   | 8 |</a:t>
+              <a:t>|*2 |  HASH JOIN         | ROWID=ROWID  |  &lt;&lt; 테이블 접근 0</a:t>
             </a:r>
             <a:endParaRPr lang="en-US" sz="1250" dirty="0"/>
           </a:p>
@@ -5152,7 +5152,7 @@
                 <a:ea typeface="Consolas" pitchFamily="34" charset="-122"/>
                 <a:cs typeface="Consolas" pitchFamily="34" charset="-120"/>
               </a:rPr>
-              <a:t>| 5 |    INDEX FAST FULL SCAN LOC_CITY_IDX   |     4 |</a:t>
+              <a:t>|*3 |   INDEX RANGE SCAN | EMP_JOB_IDX  |  access(JOB_ID)</a:t>
             </a:r>
             <a:endParaRPr lang="en-US" sz="1250" dirty="0"/>
           </a:p>
@@ -5169,27 +5169,10 @@
                 <a:ea typeface="Consolas" pitchFamily="34" charset="-122"/>
                 <a:cs typeface="Consolas" pitchFamily="34" charset="-120"/>
               </a:rPr>
-              <a:t>| 6 |    INDEX FAST FULL SCAN LOC_IDX        |     4 |</a:t>
+              <a:t>|*4 |   INDEX RANGE SCAN | EMP_IDX      |  access(EMP_ID&lt;110)</a:t>
             </a:r>
             <a:endParaRPr lang="en-US" sz="1250" dirty="0"/>
           </a:p>
-          <a:p>
-            <a:pPr algn="l" indent="0" marL="0">
-              <a:buNone/>
-            </a:pPr>
-            <a:r>
-              <a:rPr lang="en-US" sz="1250" dirty="0">
-                <a:solidFill>
-                  <a:srgbClr val="9AA6A0"/>
-                </a:solidFill>
-                <a:latin typeface="Consolas" pitchFamily="34" charset="0"/>
-                <a:ea typeface="Consolas" pitchFamily="34" charset="-122"/>
-                <a:cs typeface="Consolas" pitchFamily="34" charset="-120"/>
-              </a:rPr>
-              <a:t>-- 조건: SELECT 컬럼이 전부 인덱스 안에 있을 것</a:t>
-            </a:r>
-            <a:endParaRPr lang="en-US" sz="1250" dirty="0"/>
-          </a:p>
         </p:txBody>
       </p:sp>
       <p:sp>
@@ -5200,12 +5183,12 @@
         </p:nvSpPr>
         <p:spPr>
           <a:xfrm>
-            <a:off x="841248" y="3977640"/>
-            <a:ext cx="10506456" cy="1865376"/>
+            <a:off x="841248" y="4082796"/>
+            <a:ext cx="10506456" cy="1591056"/>
           </a:xfrm>
           <a:prstGeom prst="roundRect">
             <a:avLst>
-              <a:gd name="adj" fmla="val 5882"/>
+              <a:gd name="adj" fmla="val 6897"/>
             </a:avLst>
           </a:prstGeom>
           <a:solidFill>
@@ -5234,8 +5217,8 @@
         </p:nvSpPr>
         <p:spPr>
           <a:xfrm>
-            <a:off x="868680" y="4096512"/>
-            <a:ext cx="73152" cy="1627632"/>
+            <a:off x="868680" y="4201668"/>
+            <a:ext cx="73152" cy="1353312"/>
           </a:xfrm>
           <a:prstGeom prst="roundRect">
             <a:avLst>
@@ -5261,7 +5244,7 @@
         </p:nvSpPr>
         <p:spPr>
           <a:xfrm>
-            <a:off x="1161288" y="4178808"/>
+            <a:off x="1161288" y="4283964"/>
             <a:ext cx="9957816" cy="365760"/>
           </a:xfrm>
           <a:prstGeom prst="rect">
@@ -5286,7 +5269,7 @@
                 <a:ea typeface="맑은 고딕" pitchFamily="34" charset="-122"/>
                 <a:cs typeface="맑은 고딕" pitchFamily="34" charset="-120"/>
               </a:rPr>
-              <a:t>오타 사례 2탄</a:t>
+              <a:t>filter → access, 그러나 실측이 판정</a:t>
             </a:r>
             <a:endParaRPr lang="en-US" sz="1400" dirty="0"/>
           </a:p>
@@ -5300,8 +5283,8 @@
         </p:nvSpPr>
         <p:spPr>
           <a:xfrm>
-            <a:off x="1161288" y="4636008"/>
-            <a:ext cx="9957816" cy="1042416"/>
+            <a:off x="1161288" y="4741164"/>
+            <a:ext cx="9957816" cy="768096"/>
           </a:xfrm>
           <a:prstGeom prst="rect">
             <a:avLst/>
@@ -5325,7 +5308,7 @@
                 <a:ea typeface="맑은 고딕" pitchFamily="34" charset="-122"/>
                 <a:cs typeface="맑은 고딕" pitchFamily="34" charset="-120"/>
               </a:rPr>
-              <a:t>gather_plan_statistcs(i 누락) → 플랜 Note에 'basic plan statistics not available' 경고, Starts·A-Rows 안 찍힘. 어제 nse_nl은 조용히 무시 — 오늘 건 흔적이 남았다. 힌트 오타는 늘 의심.</a:t>
+              <a:t>index_join은 '진입 후 확인 filter'까지 access로(4→3, 테이블 접근 0). 반면 조건 없는 조회에선 16 vs full 11로 full 승. + 오타 2탄: gather_plan_statistcs → Note 경고.</a:t>
             </a:r>
             <a:endParaRPr lang="en-US" sz="1300" dirty="0"/>
           </a:p>
